--- a/ProgrammingJavaScript/Lectures/Week12/Week12.pptx
+++ b/ProgrammingJavaScript/Lectures/Week12/Week12.pptx
@@ -290,7 +290,7 @@
           <a:p>
             <a:fld id="{2395C5C9-164C-46B3-A87E-7660D39D3106}" type="datetime2">
               <a:rPr lang="en-US" smtClean="0"/>
-              <a:t>Wednesday, July 26, 2023</a:t>
+              <a:t>Tuesday, December 5, 2023</a:t>
             </a:fld>
             <a:endParaRPr lang="en-US" dirty="0"/>
           </a:p>
@@ -493,7 +493,7 @@
           <a:p>
             <a:fld id="{5B75179A-1E2B-41AB-B400-4F1B4022FAEE}" type="datetime2">
               <a:rPr lang="en-US" smtClean="0"/>
-              <a:t>Wednesday, July 26, 2023</a:t>
+              <a:t>Tuesday, December 5, 2023</a:t>
             </a:fld>
             <a:endParaRPr lang="en-US"/>
           </a:p>
@@ -706,7 +706,7 @@
           <a:p>
             <a:fld id="{05681D0F-6595-4F14-8EF3-954CD87C797B}" type="datetime2">
               <a:rPr lang="en-US" smtClean="0"/>
-              <a:t>Wednesday, July 26, 2023</a:t>
+              <a:t>Tuesday, December 5, 2023</a:t>
             </a:fld>
             <a:endParaRPr lang="en-US"/>
           </a:p>
@@ -908,7 +908,7 @@
           <a:p>
             <a:fld id="{4DDCFF8A-AAF8-4A12-8A91-9CA0EAF6CBB9}" type="datetime2">
               <a:rPr lang="en-US" smtClean="0"/>
-              <a:t>Wednesday, July 26, 2023</a:t>
+              <a:t>Tuesday, December 5, 2023</a:t>
             </a:fld>
             <a:endParaRPr lang="en-US" dirty="0"/>
           </a:p>
@@ -1187,7 +1187,7 @@
           <a:p>
             <a:fld id="{ABCC25C3-021A-4B0B-8F70-0C181FE1CF45}" type="datetime2">
               <a:rPr lang="en-US" smtClean="0"/>
-              <a:t>Wednesday, July 26, 2023</a:t>
+              <a:t>Tuesday, December 5, 2023</a:t>
             </a:fld>
             <a:endParaRPr lang="en-US"/>
           </a:p>
@@ -1447,7 +1447,7 @@
           <a:p>
             <a:fld id="{0C23D88D-8CEC-4ED9-A53B-5596187D9A16}" type="datetime2">
               <a:rPr lang="en-US" smtClean="0"/>
-              <a:t>Wednesday, July 26, 2023</a:t>
+              <a:t>Tuesday, December 5, 2023</a:t>
             </a:fld>
             <a:endParaRPr lang="en-US"/>
           </a:p>
@@ -1863,7 +1863,7 @@
           <a:p>
             <a:fld id="{D2CCD382-DFDA-4722-A27A-59C21AD112F2}" type="datetime2">
               <a:rPr lang="en-US" smtClean="0"/>
-              <a:t>Wednesday, July 26, 2023</a:t>
+              <a:t>Tuesday, December 5, 2023</a:t>
             </a:fld>
             <a:endParaRPr lang="en-US"/>
           </a:p>
@@ -2008,7 +2008,7 @@
           <a:p>
             <a:fld id="{22F2A30D-1C09-413F-AAB1-38F366000715}" type="datetime2">
               <a:rPr lang="en-US" smtClean="0"/>
-              <a:t>Wednesday, July 26, 2023</a:t>
+              <a:t>Tuesday, December 5, 2023</a:t>
             </a:fld>
             <a:endParaRPr lang="en-US"/>
           </a:p>
@@ -2130,7 +2130,7 @@
           <a:p>
             <a:fld id="{6DB82B9C-D65E-4F64-95C3-B10F3B00F0D9}" type="datetime2">
               <a:rPr lang="en-US" smtClean="0"/>
-              <a:t>Wednesday, July 26, 2023</a:t>
+              <a:t>Tuesday, December 5, 2023</a:t>
             </a:fld>
             <a:endParaRPr lang="en-US"/>
           </a:p>
@@ -2453,7 +2453,7 @@
           <a:p>
             <a:fld id="{B7F5FDCC-6AAC-4A08-B9E0-3793AB5E64C3}" type="datetime2">
               <a:rPr lang="en-US" smtClean="0"/>
-              <a:t>Wednesday, July 26, 2023</a:t>
+              <a:t>Tuesday, December 5, 2023</a:t>
             </a:fld>
             <a:endParaRPr lang="en-US"/>
           </a:p>
@@ -2741,7 +2741,7 @@
           <a:p>
             <a:fld id="{349FE94D-439C-40F1-900E-BC07940E3988}" type="datetime2">
               <a:rPr lang="en-US" smtClean="0"/>
-              <a:t>Wednesday, July 26, 2023</a:t>
+              <a:t>Tuesday, December 5, 2023</a:t>
             </a:fld>
             <a:endParaRPr lang="en-US"/>
           </a:p>
@@ -3029,7 +3029,7 @@
           <a:p>
             <a:fld id="{8DEA2CF1-0EB2-4673-802D-3371233E4A77}" type="datetime2">
               <a:rPr lang="en-US" smtClean="0"/>
-              <a:t>Wednesday, July 26, 2023</a:t>
+              <a:t>Tuesday, December 5, 2023</a:t>
             </a:fld>
             <a:endParaRPr lang="en-US" dirty="0"/>
           </a:p>
@@ -7060,6 +7060,58 @@
           <a:p>
             <a:endParaRPr lang="en-CA" dirty="0"/>
           </a:p>
+          <a:p>
+            <a:r>
+              <a:rPr lang="en-US" b="0" i="0" dirty="0" err="1">
+                <a:solidFill>
+                  <a:srgbClr val="FFFFFF"/>
+                </a:solidFill>
+                <a:effectLst/>
+                <a:latin typeface="Söhne Mono"/>
+              </a:rPr>
+              <a:t>npm</a:t>
+            </a:r>
+            <a:r>
+              <a:rPr lang="en-US" b="0" i="0" dirty="0">
+                <a:solidFill>
+                  <a:srgbClr val="FFFFFF"/>
+                </a:solidFill>
+                <a:effectLst/>
+                <a:latin typeface="Söhne Mono"/>
+              </a:rPr>
+              <a:t> install @testing-library/user-event@latest</a:t>
+            </a:r>
+            <a:br>
+              <a:rPr lang="en-CA" dirty="0">
+                <a:solidFill>
+                  <a:srgbClr val="FFFFFF"/>
+                </a:solidFill>
+                <a:latin typeface="Söhne Mono"/>
+              </a:rPr>
+            </a:br>
+            <a:r>
+              <a:rPr lang="en-CA" dirty="0">
+                <a:solidFill>
+                  <a:srgbClr val="FFFFFF"/>
+                </a:solidFill>
+                <a:latin typeface="Söhne Mono"/>
+              </a:rPr>
+              <a:t>Run above command to update to the latest version of </a:t>
+            </a:r>
+            <a:r>
+              <a:rPr lang="en-CA">
+                <a:solidFill>
+                  <a:srgbClr val="FFFFFF"/>
+                </a:solidFill>
+                <a:latin typeface="Söhne Mono"/>
+              </a:rPr>
+              <a:t>user-event library</a:t>
+            </a:r>
+            <a:endParaRPr lang="en-CA" dirty="0"/>
+          </a:p>
+          <a:p>
+            <a:endParaRPr lang="en-CA" dirty="0"/>
+          </a:p>
         </p:txBody>
       </p:sp>
     </p:spTree>
@@ -8685,15 +8737,6 @@
 </file>
 
 <file path=customXml/item1.xml><?xml version="1.0" encoding="utf-8"?>
-<?mso-contentType ?>
-<FormTemplates xmlns="http://schemas.microsoft.com/sharepoint/v3/contenttype/forms">
-  <Display>DocumentLibraryForm</Display>
-  <Edit>DocumentLibraryForm</Edit>
-  <New>DocumentLibraryForm</New>
-</FormTemplates>
-</file>
-
-<file path=customXml/item2.xml><?xml version="1.0" encoding="utf-8"?>
 <ct:contentTypeSchema xmlns:ct="http://schemas.microsoft.com/office/2006/metadata/contentType" xmlns:ma="http://schemas.microsoft.com/office/2006/metadata/properties/metaAttributes" ct:_="" ma:_="" ma:contentTypeName="Document" ma:contentTypeID="0x01010084DDCB6E2755994FAEA82EE53D3EFEF4" ma:contentTypeVersion="13" ma:contentTypeDescription="Create a new document." ma:contentTypeScope="" ma:versionID="bf637e3371e92fd5d755f42076d972e0">
   <xsd:schema xmlns:xsd="http://www.w3.org/2001/XMLSchema" xmlns:xs="http://www.w3.org/2001/XMLSchema" xmlns:p="http://schemas.microsoft.com/office/2006/metadata/properties" xmlns:ns2="5d4ed4ad-c368-4ae0-b57a-9fad76fa8ba4" xmlns:ns3="ea4d700e-bb3a-4d33-bd5c-e37bab34155a" targetNamespace="http://schemas.microsoft.com/office/2006/metadata/properties" ma:root="true" ma:fieldsID="4c6dcf755ab8d70122d1d1fd1480be27" ns2:_="" ns3:_="">
     <xsd:import namespace="5d4ed4ad-c368-4ae0-b57a-9fad76fa8ba4"/>
@@ -8916,15 +8959,16 @@
 </ct:contentTypeSchema>
 </file>
 
-<file path=customXml/itemProps1.xml><?xml version="1.0" encoding="utf-8"?>
-<ds:datastoreItem xmlns:ds="http://schemas.openxmlformats.org/officeDocument/2006/customXml" ds:itemID="{D6ECFDA5-7D59-48AB-8F8A-5B77C3955619}">
-  <ds:schemaRefs>
-    <ds:schemaRef ds:uri="http://schemas.microsoft.com/sharepoint/v3/contenttype/forms"/>
-  </ds:schemaRefs>
-</ds:datastoreItem>
+<file path=customXml/item2.xml><?xml version="1.0" encoding="utf-8"?>
+<?mso-contentType ?>
+<FormTemplates xmlns="http://schemas.microsoft.com/sharepoint/v3/contenttype/forms">
+  <Display>DocumentLibraryForm</Display>
+  <Edit>DocumentLibraryForm</Edit>
+  <New>DocumentLibraryForm</New>
+</FormTemplates>
 </file>
 
-<file path=customXml/itemProps2.xml><?xml version="1.0" encoding="utf-8"?>
+<file path=customXml/itemProps1.xml><?xml version="1.0" encoding="utf-8"?>
 <ds:datastoreItem xmlns:ds="http://schemas.openxmlformats.org/officeDocument/2006/customXml" ds:itemID="{209CD068-17B3-4A8F-8754-19CA5F3D284E}">
   <ds:schemaRefs>
     <ds:schemaRef ds:uri="http://schemas.microsoft.com/office/2006/metadata/contentType"/>
@@ -8941,4 +8985,12 @@
     <ds:schemaRef ds:uri="http://schemas.microsoft.com/internal/obd"/>
   </ds:schemaRefs>
 </ds:datastoreItem>
+</file>
+
+<file path=customXml/itemProps2.xml><?xml version="1.0" encoding="utf-8"?>
+<ds:datastoreItem xmlns:ds="http://schemas.openxmlformats.org/officeDocument/2006/customXml" ds:itemID="{D6ECFDA5-7D59-48AB-8F8A-5B77C3955619}">
+  <ds:schemaRefs>
+    <ds:schemaRef ds:uri="http://schemas.microsoft.com/sharepoint/v3/contenttype/forms"/>
+  </ds:schemaRefs>
+</ds:datastoreItem>
 </file>